--- a/docs/OSMU_사용자_가이드.pptx
+++ b/docs/OSMU_사용자_가이드.pptx
@@ -8664,7 +8664,7 @@
                 </a:solidFill>
                 <a:latin typeface="맑은 고딕"/>
               </a:rPr>
-              <a:t>두 API가 함께 도는 곳 — 키워드 갱신</a:t>
+              <a:t>두 API가 함께 도는 곳 — SEO 키워드 새로 고르기</a:t>
             </a:r>
           </a:p>
         </p:txBody>
@@ -8781,7 +8781,7 @@
                 </a:solidFill>
                 <a:latin typeface="맑은 고딕"/>
               </a:rPr>
-              <a:t>⚙️ 설정 → 키워드 갱신의 4단계 각각이 어느 API를 쓰는지 표시했습니다.</a:t>
+              <a:t>⚙️ 설정 → 🔑 SEO 키워드 새로 고르기의 4단계 각각이 어느 API를 쓰는지 표시했습니다. 4단계 [적용]이 곧 브랜드 킷 SEO 키워드 교체입니다.</a:t>
             </a:r>
           </a:p>
         </p:txBody>
@@ -10943,7 +10943,7 @@
                 </a:solidFill>
                 <a:latin typeface="맑은 고딕"/>
               </a:rPr>
-              <a:t>A. ⚙️ 설정 → 키워드 갱신 → [🔄 숫자만 새로 재기]를 누르세요. 캐시가 살아있는 값은 재과금되지 않습니다.</a:t>
+              <a:t>A. ⚙️ 설정 → 🔄 키워드 수치 유지 → [🔄 숫자만 새로 재기]를 누르세요. 캐시가 살아있는 값은 재과금되지 않습니다.</a:t>
             </a:r>
           </a:p>
         </p:txBody>
@@ -14916,7 +14916,7 @@
                 </a:solidFill>
                 <a:latin typeface="맑은 고딕"/>
               </a:rPr>
-              <a:t>두 파일을 함께 — core/brand_seed.py + assets/custom.css</a:t>
+              <a:t>core/brand_seed.py 의 BRAND_COLORS 한 곳</a:t>
             </a:r>
           </a:p>
         </p:txBody>
@@ -20889,7 +20889,7 @@
                           </a:solidFill>
                           <a:latin typeface="맑은 고딕"/>
                         </a:rPr>
-                        <a:t>LLM 벤더, 네이버 API 키 2종, 키워드 갱신, 사용량 — Part 2에서 상세히</a:t>
+                        <a:t>LLM 벤더, 네이버 API 키 2종, SEO 키워드 새로 고르기·수치 유지, 사용량 — Part 2에서 상세히</a:t>
                       </a:r>
                     </a:p>
                   </a:txBody>

--- a/docs/OSMU_사용자_가이드.pptx
+++ b/docs/OSMU_사용자_가이드.pptx
@@ -3873,7 +3873,7 @@
                 </a:solidFill>
                 <a:latin typeface="맑은 고딕"/>
               </a:rPr>
-              <a:t>이 앱에서 '네이버'와 관련된 기능은 셋입니다 — 이 중 API 키가 필요한 것은 하나뿐입니다.</a:t>
+              <a:t>이 앱에서 '네이버'와 관련된 기능은 셋입니다 — 이 중 API 키 등록이 필수인 것은 하나뿐입니다.</a:t>
             </a:r>
           </a:p>
         </p:txBody>
@@ -4032,7 +4032,7 @@
                           </a:solidFill>
                           <a:latin typeface="맑은 고딕"/>
                         </a:rPr>
-                        <a:t>❌ 불필요 · 완전 무료</a:t>
+                        <a:t>⚠️ 보통 불필요 · 막히면 유료 전환</a:t>
                       </a:r>
                     </a:p>
                   </a:txBody>
@@ -22574,7 +22574,7 @@
         <p:spPr>
           <a:xfrm>
             <a:off x="502920" y="5943600"/>
-            <a:ext cx="11155680" cy="457200"/>
+            <a:ext cx="11155680" cy="640080"/>
           </a:xfrm>
           <a:prstGeom prst="rect">
             <a:avLst/>
@@ -22589,7 +22589,7 @@
           <a:p>
             <a:pPr algn="l">
               <a:lnSpc>
-                <a:spcPct val="100000"/>
+                <a:spcPct val="120000"/>
               </a:lnSpc>
             </a:pPr>
             <a:r>
@@ -22600,6 +22600,22 @@
                 <a:latin typeface="맑은 고딕"/>
               </a:rPr>
               <a:t>생성 후 4개 탭(네이버/인스타/X/쇼츠)에서 직접 편집·복사할 수 있고, 우측 시뮬레이터로 실제 레이아웃을 미리 봅니다.</a:t>
+            </a:r>
+          </a:p>
+          <a:p>
+            <a:pPr algn="l">
+              <a:lnSpc>
+                <a:spcPct val="120000"/>
+              </a:lnSpc>
+            </a:pPr>
+            <a:r>
+              <a:rPr sz="1200" b="0" i="0">
+                <a:solidFill>
+                  <a:srgbClr val="8A7B6B"/>
+                </a:solidFill>
+                <a:latin typeface="맑은 고딕"/>
+              </a:rPr>
+              <a:t>인스타·X·쇼츠·발행 태그는 길이·해시태그·인증 표현을 생성 직후 자동으로 점검·정리하며, 본문을 고치면 [📣 SNS 3채널 다시 만들기]로 최신 내용에 맞춰 다시 만들 수 있습니다.</a:t>
             </a:r>
           </a:p>
         </p:txBody>
@@ -22969,7 +22985,7 @@
                 </a:solidFill>
                 <a:latin typeface="맑은 고딕"/>
               </a:rPr>
-              <a:t>▪ Google 뉴스 RSS + 네이버 뉴스 검색 결과 페이지를 직접 조회합니다 — API 키가 필요 없고 완전 무료입니다.</a:t>
+              <a:t>▪ Google 뉴스 RSS + 네이버 뉴스 검색 결과 페이지를 직접 조회가 기본이며 API 키가 필요 없습니다. 조회가 막히면 등록된 네이버 API HUB 키로 자동 전환됩니다(유료, 오늘 호출에 집계).</a:t>
             </a:r>
           </a:p>
           <a:p>
